--- a/examples/ppt/textboxes/textboxes-advanced.pptx
+++ b/examples/ppt/textboxes/textboxes-advanced.pptx
@@ -5,11 +5,12 @@
     <p:sldMasterId xmlns:r="http://schemas.openxmlformats.org/officeDocument/2006/relationships" id="2147483648" r:id="rId1"/>
   </p:sldMasterIdLst>
   <p:sldIdLst>
-    <p:sldId id="256" r:id="Rb820ae78f9494768"/>
-    <p:sldId id="257" r:id="Rbb523ab93e194683"/>
-    <p:sldId id="258" r:id="R7b3dadc819574e8b"/>
-    <p:sldId id="259" r:id="R6c2684641b484129"/>
-    <p:sldId id="260" r:id="R3fe49f136e714a57"/>
+    <p:sldId id="256" r:id="Ra53b51e9734d4bb8"/>
+    <p:sldId id="257" r:id="R43b6f9fa53e94e69"/>
+    <p:sldId id="258" r:id="R969a639407534e3c"/>
+    <p:sldId id="259" r:id="R3eecade188a245d8"/>
+    <p:sldId id="260" r:id="Rde982eea5798400f"/>
+    <p:sldId id="261" r:id="Raf1335e67cf844b7"/>
   </p:sldIdLst>
   <p:sldSz cx="12192000" cy="6858000"/>
   <p:notesSz cx="6858000" cy="9144000"/>
@@ -318,7 +319,7 @@
       <p:grpSpPr/>
       <p:sp>
         <p:nvSpPr>
-          <p:cNvPr id="10000" name="TextBox 1"/>
+          <p:cNvPr id="100000" name="TextBox 1"/>
           <p:cNvSpPr txBox="1"/>
           <p:nvPr/>
         </p:nvSpPr>
@@ -344,7 +345,7 @@
       </p:sp>
       <p:sp>
         <p:nvSpPr>
-          <p:cNvPr id="10001" name="TextBox 2"/>
+          <p:cNvPr id="100001" name="TextBox 2"/>
           <p:cNvSpPr txBox="1"/>
           <p:nvPr/>
         </p:nvSpPr>
@@ -424,7 +425,7 @@
       <p:grpSpPr/>
       <p:sp>
         <p:nvSpPr>
-          <p:cNvPr id="10002" name="TextBox 1"/>
+          <p:cNvPr id="100002" name="TextBox 1"/>
           <p:cNvSpPr txBox="1"/>
           <p:nvPr/>
         </p:nvSpPr>
@@ -450,7 +451,7 @@
       </p:sp>
       <p:sp>
         <p:nvSpPr>
-          <p:cNvPr id="10003" name="TextBox 2"/>
+          <p:cNvPr id="100003" name="TextBox 2"/>
           <p:cNvSpPr txBox="1"/>
           <p:nvPr/>
         </p:nvSpPr>
@@ -479,7 +480,7 @@
       </p:sp>
       <p:sp>
         <p:nvSpPr>
-          <p:cNvPr id="10004" name="TextBox 3"/>
+          <p:cNvPr id="100004" name="TextBox 3"/>
           <p:cNvSpPr txBox="1"/>
           <p:nvPr/>
         </p:nvSpPr>
@@ -509,7 +510,7 @@
       </p:sp>
       <p:sp>
         <p:nvSpPr>
-          <p:cNvPr id="10005" name="TextBox 4"/>
+          <p:cNvPr id="100005" name="TextBox 4"/>
           <p:cNvSpPr txBox="1"/>
           <p:nvPr/>
         </p:nvSpPr>
@@ -539,7 +540,7 @@
       </p:sp>
       <p:sp>
         <p:nvSpPr>
-          <p:cNvPr id="10006" name="TextBox 5"/>
+          <p:cNvPr id="100006" name="TextBox 5"/>
           <p:cNvSpPr txBox="1"/>
           <p:nvPr/>
         </p:nvSpPr>
@@ -569,7 +570,7 @@
       </p:sp>
       <p:sp>
         <p:nvSpPr>
-          <p:cNvPr id="10007" name="TextBox 6"/>
+          <p:cNvPr id="100007" name="TextBox 6"/>
           <p:cNvSpPr txBox="1"/>
           <p:nvPr/>
         </p:nvSpPr>
@@ -614,7 +615,7 @@
       <p:grpSpPr/>
       <p:sp>
         <p:nvSpPr>
-          <p:cNvPr id="10008" name="TextBox 1"/>
+          <p:cNvPr id="100008" name="TextBox 1"/>
           <p:cNvSpPr txBox="1"/>
           <p:nvPr/>
         </p:nvSpPr>
@@ -640,7 +641,7 @@
       </p:sp>
       <p:sp>
         <p:nvSpPr>
-          <p:cNvPr id="10009" name="TextBox 2"/>
+          <p:cNvPr id="100009" name="TextBox 2"/>
           <p:cNvSpPr txBox="1"/>
           <p:nvPr/>
         </p:nvSpPr>
@@ -666,21 +667,18 @@
             </a:r>
           </a:p>
           <a:p xmlns:a="http://schemas.openxmlformats.org/drawingml/2006/main">
-            <a:pPr/>
             <a:r>
               <a:rPr lang="en-US" b="1"/>
               <a:t>[bold=true at paragraph level]  Whole paragraph is bold.</a:t>
             </a:r>
           </a:p>
           <a:p xmlns:a="http://schemas.openxmlformats.org/drawingml/2006/main">
-            <a:pPr/>
             <a:r>
               <a:rPr lang="en-US" i="1"/>
               <a:t>[italic=true at paragraph level]  Whole paragraph is italic.</a:t>
             </a:r>
           </a:p>
           <a:p xmlns:a="http://schemas.openxmlformats.org/drawingml/2006/main">
-            <a:pPr/>
             <a:r>
               <a:rPr lang="en-US">
                 <a:solidFill>
@@ -691,14 +689,12 @@
             </a:r>
           </a:p>
           <a:p xmlns:a="http://schemas.openxmlformats.org/drawingml/2006/main">
-            <a:pPr/>
             <a:r>
               <a:rPr lang="en-US" sz="2200"/>
               <a:t>[size=22 at paragraph level]  Whole paragraph is 22pt.</a:t>
             </a:r>
           </a:p>
           <a:p xmlns:a="http://schemas.openxmlformats.org/drawingml/2006/main">
-            <a:pPr/>
             <a:r>
               <a:rPr lang="fr-FR">
                 <a:solidFill>
@@ -727,7 +723,7 @@
       <p:grpSpPr/>
       <p:sp>
         <p:nvSpPr>
-          <p:cNvPr id="10010" name="TextBox 1"/>
+          <p:cNvPr id="100010" name="TextBox 1"/>
           <p:cNvSpPr txBox="1"/>
           <p:nvPr/>
         </p:nvSpPr>
@@ -750,21 +746,21 @@
             </a:r>
             <a:r>
               <a:rPr lang="en-US"/>
-              <a:t>Mix </a:t>
+              <a:t xml:space="preserve">Mix </a:t>
             </a:r>
             <a:r>
               <a:rPr lang="en-US" sz="2400">
                 <a:latin typeface="Times New Roman"/>
                 <a:ea typeface="Times New Roman"/>
               </a:rPr>
-              <a:t>Times </a:t>
+              <a:t xml:space="preserve">Times </a:t>
             </a:r>
             <a:r>
               <a:rPr lang="en-US" sz="1800">
                 <a:latin typeface="Courier New"/>
                 <a:ea typeface="Courier New"/>
               </a:rPr>
-              <a:t>Courier </a:t>
+              <a:t xml:space="preserve">Courier </a:t>
             </a:r>
             <a:r>
               <a:rPr lang="en-US" sz="2800" b="1">
@@ -778,7 +774,7 @@
       </p:sp>
       <p:sp>
         <p:nvSpPr>
-          <p:cNvPr id="10011" name="TextBox 2"/>
+          <p:cNvPr id="100011" name="TextBox 2"/>
           <p:cNvSpPr txBox="1"/>
           <p:nvPr/>
         </p:nvSpPr>
@@ -797,42 +793,39 @@
           <a:p xmlns:a="http://schemas.openxmlformats.org/drawingml/2006/main">
             <a:r>
               <a:rPr lang="en-US" sz="2000"/>
-              <a:t/>
-            </a:r>
-            <a:r>
-              <a:rPr lang="en-US"/>
-              <a:t>Normal </a:t>
-            </a:r>
-            <a:r>
-              <a:rPr lang="en-US" spc="-100">
+              <a:t xml:space="preserve">Normal </a:t>
+            </a:r>
+            <a:r>
+              <a:rPr lang="en-US" sz="2000" spc="-100">
                 <a:solidFill>
                   <a:srgbClr val="E63946"/>
                 </a:solidFill>
               </a:rPr>
-              <a:t>TIGHTENED </a:t>
-            </a:r>
-            <a:r>
-              <a:rPr lang="en-US" spc="400">
+              <a:t xml:space="preserve">TIGHTENED </a:t>
+            </a:r>
+            <a:r>
+              <a:rPr lang="en-US" sz="2000" spc="400">
                 <a:solidFill>
                   <a:srgbClr val="2A9D8F"/>
                 </a:solidFill>
               </a:rPr>
-              <a:t>LOOSENED </a:t>
-            </a:r>
-            <a:r>
-              <a:rPr lang="en-US" spc="800">
+              <a:t xml:space="preserve">LOOSENED </a:t>
+            </a:r>
+            <a:r>
+              <a:rPr lang="en-US" sz="2000" spc="800">
                 <a:solidFill>
                   <a:srgbClr val="1D3557"/>
                 </a:solidFill>
               </a:rPr>
               <a:t>EXPANDED</a:t>
             </a:r>
-          </a:p>
-        </p:txBody>
-      </p:sp>
-      <p:sp>
-        <p:nvSpPr>
-          <p:cNvPr id="10012" name="TextBox 3"/>
+            <a:endParaRPr lang="en-US" sz="2000"/>
+          </a:p>
+        </p:txBody>
+      </p:sp>
+      <p:sp>
+        <p:nvSpPr>
+          <p:cNvPr id="100012" name="TextBox 3"/>
           <p:cNvSpPr txBox="1"/>
           <p:nvPr/>
         </p:nvSpPr>
@@ -850,27 +843,24 @@
           <a:lstStyle xmlns:a="http://schemas.openxmlformats.org/drawingml/2006/main"/>
           <a:p xmlns:a="http://schemas.openxmlformats.org/drawingml/2006/main">
             <a:r>
-              <a:rPr lang="en-US" sz="2000" b="1"/>
-              <a:t/>
-            </a:r>
-            <a:r>
-              <a:rPr lang="en-US" kern="0"/>
-              <a:t>AV AT WA — kern=0  </a:t>
-            </a:r>
-            <a:r>
-              <a:rPr lang="en-US" kern="1">
+              <a:rPr lang="en-US" sz="2000" b="1" kern="0"/>
+              <a:t xml:space="preserve">AV AT WA — kern=0  </a:t>
+            </a:r>
+            <a:r>
+              <a:rPr lang="en-US" sz="2000" b="1" kern="1">
                 <a:solidFill>
                   <a:srgbClr val="E63946"/>
                 </a:solidFill>
               </a:rPr>
               <a:t>AV AT WA — kern=1</a:t>
             </a:r>
-          </a:p>
-        </p:txBody>
-      </p:sp>
-      <p:sp>
-        <p:nvSpPr>
-          <p:cNvPr id="10013" name="TextBox 4"/>
+            <a:endParaRPr lang="en-US" sz="2000" b="1"/>
+          </a:p>
+        </p:txBody>
+      </p:sp>
+      <p:sp>
+        <p:nvSpPr>
+          <p:cNvPr id="100013" name="TextBox 4"/>
           <p:cNvSpPr txBox="1"/>
           <p:nvPr/>
         </p:nvSpPr>
@@ -889,34 +879,31 @@
           <a:p xmlns:a="http://schemas.openxmlformats.org/drawingml/2006/main">
             <a:r>
               <a:rPr lang="en-US" sz="2000" b="1"/>
-              <a:t/>
-            </a:r>
-            <a:r>
-              <a:rPr lang="en-US"/>
-              <a:t>English: color  </a:t>
-            </a:r>
-            <a:r>
-              <a:rPr lang="en-GB">
+              <a:t xml:space="preserve">English: color  </a:t>
+            </a:r>
+            <a:r>
+              <a:rPr lang="en-GB" sz="2000" b="1">
                 <a:solidFill>
                   <a:srgbClr val="2A9D8F"/>
                 </a:solidFill>
               </a:rPr>
-              <a:t>British: colour  </a:t>
-            </a:r>
-            <a:r>
-              <a:rPr lang="fr-FR">
+              <a:t xml:space="preserve">British: colour  </a:t>
+            </a:r>
+            <a:r>
+              <a:rPr lang="fr-FR" sz="2000" b="1">
                 <a:solidFill>
                   <a:srgbClr val="E63946"/>
                 </a:solidFill>
               </a:rPr>
               <a:t>Français: couleur</a:t>
             </a:r>
-          </a:p>
-        </p:txBody>
-      </p:sp>
-      <p:sp>
-        <p:nvSpPr>
-          <p:cNvPr id="10014" name="TextBox 5"/>
+            <a:endParaRPr lang="en-US" sz="2000" b="1"/>
+          </a:p>
+        </p:txBody>
+      </p:sp>
+      <p:sp>
+        <p:nvSpPr>
+          <p:cNvPr id="100014" name="TextBox 5"/>
           <p:cNvSpPr txBox="1"/>
           <p:nvPr/>
         </p:nvSpPr>
@@ -933,10 +920,7 @@
           <a:bodyPr xmlns:a="http://schemas.openxmlformats.org/drawingml/2006/main"/>
           <a:lstStyle xmlns:a="http://schemas.openxmlformats.org/drawingml/2006/main"/>
           <a:p xmlns:a="http://schemas.openxmlformats.org/drawingml/2006/main">
-            <a:r>
-              <a:rPr lang="en-US" sz="2000"/>
-              <a:t/>
-            </a:r>
+            <a:endParaRPr lang="en-US" sz="2000"/>
           </a:p>
         </p:txBody>
       </p:sp>
@@ -957,7 +941,7 @@
       <p:grpSpPr/>
       <p:sp>
         <p:nvSpPr>
-          <p:cNvPr id="10015" name="TextBox 1"/>
+          <p:cNvPr id="100015" name="TextBox 1"/>
           <p:cNvSpPr txBox="1"/>
           <p:nvPr/>
         </p:nvSpPr>
@@ -996,7 +980,7 @@
             </a:r>
             <a:r>
               <a:rPr lang="en-US"/>
-              <a:t>   x</a:t>
+              <a:t xml:space="preserve">   x</a:t>
             </a:r>
             <a:r>
               <a:rPr lang="en-US" baseline="30000"/>
@@ -1004,7 +988,7 @@
             </a:r>
             <a:r>
               <a:rPr lang="en-US"/>
-              <a:t> + y</a:t>
+              <a:t xml:space="preserve"> + y</a:t>
             </a:r>
             <a:r>
               <a:rPr lang="en-US" baseline="30000"/>
@@ -1012,7 +996,7 @@
             </a:r>
             <a:r>
               <a:rPr lang="en-US"/>
-              <a:t> = r</a:t>
+              <a:t xml:space="preserve"> = r</a:t>
             </a:r>
             <a:r>
               <a:rPr lang="en-US" baseline="30000"/>
@@ -1023,7 +1007,7 @@
       </p:sp>
       <p:sp>
         <p:nvSpPr>
-          <p:cNvPr id="10016" name="TextBox 2"/>
+          <p:cNvPr id="100016" name="TextBox 2"/>
           <p:cNvSpPr txBox="1"/>
           <p:nvPr/>
         </p:nvSpPr>
@@ -1040,16 +1024,13 @@
           <a:bodyPr xmlns:a="http://schemas.openxmlformats.org/drawingml/2006/main"/>
           <a:lstStyle xmlns:a="http://schemas.openxmlformats.org/drawingml/2006/main"/>
           <a:p xmlns:a="http://schemas.openxmlformats.org/drawingml/2006/main">
-            <a:r>
-              <a:rPr lang="en-US" sz="2400"/>
-              <a:t/>
-            </a:r>
-          </a:p>
-        </p:txBody>
-      </p:sp>
-      <p:sp>
-        <p:nvSpPr>
-          <p:cNvPr id="10017" name="TextBox 3"/>
+            <a:endParaRPr lang="en-US" sz="2400"/>
+          </a:p>
+        </p:txBody>
+      </p:sp>
+      <p:sp>
+        <p:nvSpPr>
+          <p:cNvPr id="100017" name="TextBox 3"/>
           <p:cNvSpPr txBox="1"/>
           <p:nvPr/>
         </p:nvSpPr>
@@ -1076,7 +1057,7 @@
             </a:r>
             <a:r>
               <a:rPr lang="en-US"/>
-              <a:t>Custom: </a:t>
+              <a:t xml:space="preserve">Custom: </a:t>
             </a:r>
             <a:r>
               <a:rPr lang="en-US" baseline="50000">
@@ -1088,7 +1069,7 @@
             </a:r>
             <a:r>
               <a:rPr lang="en-US"/>
-              <a:t> higher  /  </a:t>
+              <a:t xml:space="preserve"> higher  /  </a:t>
             </a:r>
             <a:r>
               <a:rPr lang="en-US" baseline="-40000">
@@ -1100,14 +1081,14 @@
             </a:r>
             <a:r>
               <a:rPr lang="en-US"/>
-              <a:t> lower</a:t>
-            </a:r>
-          </a:p>
-        </p:txBody>
-      </p:sp>
-      <p:sp>
-        <p:nvSpPr>
-          <p:cNvPr id="10018" name="TextBox 4"/>
+              <a:t xml:space="preserve"> lower</a:t>
+            </a:r>
+          </a:p>
+        </p:txBody>
+      </p:sp>
+      <p:sp>
+        <p:nvSpPr>
+          <p:cNvPr id="100018" name="TextBox 4"/>
           <p:cNvSpPr txBox="1"/>
           <p:nvPr/>
         </p:nvSpPr>
@@ -1126,34 +1107,31 @@
           <a:p xmlns:a="http://schemas.openxmlformats.org/drawingml/2006/main">
             <a:r>
               <a:rPr lang="en-US" sz="2400"/>
-              <a:t/>
-            </a:r>
-            <a:r>
-              <a:rPr lang="en-US"/>
-              <a:t>default  </a:t>
-            </a:r>
-            <a:r>
-              <a:rPr lang="en-US" cap="small">
+              <a:t xml:space="preserve">default  </a:t>
+            </a:r>
+            <a:r>
+              <a:rPr lang="en-US" sz="2400" cap="small">
                 <a:solidFill>
                   <a:srgbClr val="2A9D8F"/>
                 </a:solidFill>
               </a:rPr>
-              <a:t>small caps  </a:t>
-            </a:r>
-            <a:r>
-              <a:rPr lang="en-US" cap="all">
+              <a:t xml:space="preserve">small caps  </a:t>
+            </a:r>
+            <a:r>
+              <a:rPr lang="en-US" sz="2400" cap="all">
                 <a:solidFill>
                   <a:srgbClr val="E63946"/>
                 </a:solidFill>
               </a:rPr>
               <a:t>ALL CAPS</a:t>
             </a:r>
-          </a:p>
-        </p:txBody>
-      </p:sp>
-      <p:sp>
-        <p:nvSpPr>
-          <p:cNvPr id="10019" name="TextBox 5"/>
+            <a:endParaRPr lang="en-US" sz="2400"/>
+          </a:p>
+        </p:txBody>
+      </p:sp>
+      <p:sp>
+        <p:nvSpPr>
+          <p:cNvPr id="100019" name="TextBox 5"/>
           <p:cNvSpPr txBox="1"/>
           <p:nvPr/>
         </p:nvSpPr>
@@ -1183,7 +1161,7 @@
       </p:sp>
       <p:sp>
         <p:nvSpPr>
-          <p:cNvPr id="10020" name="TextBox 6"/>
+          <p:cNvPr id="100020" name="TextBox 6"/>
           <p:cNvSpPr txBox="1"/>
           <p:nvPr/>
         </p:nvSpPr>
@@ -1200,16 +1178,13 @@
           <a:bodyPr xmlns:a="http://schemas.openxmlformats.org/drawingml/2006/main"/>
           <a:lstStyle xmlns:a="http://schemas.openxmlformats.org/drawingml/2006/main"/>
           <a:p xmlns:a="http://schemas.openxmlformats.org/drawingml/2006/main">
-            <a:r>
-              <a:rPr lang="en-US" sz="2000" b="1"/>
-              <a:t/>
-            </a:r>
-          </a:p>
-        </p:txBody>
-      </p:sp>
-      <p:sp>
-        <p:nvSpPr>
-          <p:cNvPr id="10021" name="TextBox 7"/>
+            <a:endParaRPr lang="en-US" sz="2000" b="1"/>
+          </a:p>
+        </p:txBody>
+      </p:sp>
+      <p:sp>
+        <p:nvSpPr>
+          <p:cNvPr id="100021" name="TextBox 7"/>
           <p:cNvSpPr txBox="1"/>
           <p:nvPr/>
         </p:nvSpPr>
@@ -1233,6 +1208,358 @@
                 </a:solidFill>
               </a:rPr>
               <a:t>Per-run cap=small / cap=all / cap=none, plus allCaps / smallCaps boolean aliases.</a:t>
+            </a:r>
+          </a:p>
+        </p:txBody>
+      </p:sp>
+    </p:spTree>
+  </p:cSld>
+</p:sld>
+</file>
+
+<file path=ppt/slides/slide6.xml><?xml version="1.0" encoding="utf-8"?>
+<p:sld xmlns:p="http://schemas.openxmlformats.org/presentationml/2006/main">
+  <p:cSld>
+    <p:spTree>
+      <p:nvGrpSpPr>
+        <p:cNvPr id="1" name=""/>
+        <p:cNvGrpSpPr/>
+        <p:nvPr/>
+      </p:nvGrpSpPr>
+      <p:grpSpPr/>
+      <p:sp>
+        <p:nvSpPr>
+          <p:cNvPr id="100025" name="tb-back"/>
+          <p:cNvSpPr txBox="1"/>
+          <p:nvPr/>
+        </p:nvSpPr>
+        <p:spPr>
+          <a:xfrm xmlns:a="http://schemas.openxmlformats.org/drawingml/2006/main">
+            <a:off x="5486400" y="1097280"/>
+            <a:ext cx="2743200" cy="1828800"/>
+          </a:xfrm>
+          <a:prstGeom xmlns:a="http://schemas.openxmlformats.org/drawingml/2006/main" prst="rect">
+            <a:avLst/>
+          </a:prstGeom>
+          <a:solidFill xmlns:a="http://schemas.openxmlformats.org/drawingml/2006/main">
+            <a:srgbClr val="4472C4"/>
+          </a:solidFill>
+        </p:spPr>
+        <p:txBody>
+          <a:bodyPr xmlns:a="http://schemas.openxmlformats.org/drawingml/2006/main"/>
+          <a:lstStyle xmlns:a="http://schemas.openxmlformats.org/drawingml/2006/main"/>
+          <a:p xmlns:a="http://schemas.openxmlformats.org/drawingml/2006/main">
+            <a:r>
+              <a:rPr lang="en-US" sz="1600" b="1">
+                <a:solidFill>
+                  <a:srgbClr val="FFFFFF"/>
+                </a:solidFill>
+              </a:rPr>
+              <a:t>back (zorder=1)</a:t>
+            </a:r>
+          </a:p>
+        </p:txBody>
+      </p:sp>
+      <p:sp>
+        <p:nvSpPr>
+          <p:cNvPr id="100026" name="tb-mid"/>
+          <p:cNvSpPr txBox="1"/>
+          <p:nvPr/>
+        </p:nvSpPr>
+        <p:spPr>
+          <a:xfrm xmlns:a="http://schemas.openxmlformats.org/drawingml/2006/main">
+            <a:off x="6400800" y="1463040"/>
+            <a:ext cx="2743200" cy="1828800"/>
+          </a:xfrm>
+          <a:prstGeom xmlns:a="http://schemas.openxmlformats.org/drawingml/2006/main" prst="rect">
+            <a:avLst/>
+          </a:prstGeom>
+          <a:solidFill xmlns:a="http://schemas.openxmlformats.org/drawingml/2006/main">
+            <a:srgbClr val="E63946"/>
+          </a:solidFill>
+        </p:spPr>
+        <p:txBody>
+          <a:bodyPr xmlns:a="http://schemas.openxmlformats.org/drawingml/2006/main"/>
+          <a:lstStyle xmlns:a="http://schemas.openxmlformats.org/drawingml/2006/main"/>
+          <a:p xmlns:a="http://schemas.openxmlformats.org/drawingml/2006/main">
+            <a:r>
+              <a:rPr lang="en-US" sz="1600" b="1">
+                <a:solidFill>
+                  <a:srgbClr val="FFFFFF"/>
+                </a:solidFill>
+              </a:rPr>
+              <a:t>mid (zorder=2)</a:t>
+            </a:r>
+          </a:p>
+        </p:txBody>
+      </p:sp>
+      <p:sp>
+        <p:nvSpPr>
+          <p:cNvPr id="100027" name="tb-front"/>
+          <p:cNvSpPr txBox="1"/>
+          <p:nvPr/>
+        </p:nvSpPr>
+        <p:spPr>
+          <a:xfrm xmlns:a="http://schemas.openxmlformats.org/drawingml/2006/main">
+            <a:off x="7315200" y="1828800"/>
+            <a:ext cx="2743200" cy="1828800"/>
+          </a:xfrm>
+          <a:prstGeom xmlns:a="http://schemas.openxmlformats.org/drawingml/2006/main" prst="rect">
+            <a:avLst/>
+          </a:prstGeom>
+          <a:solidFill xmlns:a="http://schemas.openxmlformats.org/drawingml/2006/main">
+            <a:srgbClr val="2A9D8F"/>
+          </a:solidFill>
+        </p:spPr>
+        <p:txBody>
+          <a:bodyPr xmlns:a="http://schemas.openxmlformats.org/drawingml/2006/main"/>
+          <a:lstStyle xmlns:a="http://schemas.openxmlformats.org/drawingml/2006/main"/>
+          <a:p xmlns:a="http://schemas.openxmlformats.org/drawingml/2006/main">
+            <a:r>
+              <a:rPr lang="en-US" sz="1600" b="1">
+                <a:solidFill>
+                  <a:srgbClr val="FFFFFF"/>
+                </a:solidFill>
+              </a:rPr>
+              <a:t>front (zorder=3)</a:t>
+            </a:r>
+          </a:p>
+        </p:txBody>
+      </p:sp>
+      <p:sp>
+        <p:nvSpPr>
+          <p:cNvPr id="100022" name="TextBox 1"/>
+          <p:cNvSpPr txBox="1"/>
+          <p:nvPr/>
+        </p:nvSpPr>
+        <p:spPr>
+          <a:xfrm xmlns:a="http://schemas.openxmlformats.org/drawingml/2006/main">
+            <a:off x="457200" y="274320"/>
+            <a:ext cx="11887200" cy="548640"/>
+          </a:xfrm>
+          <a:prstGeom xmlns:a="http://schemas.openxmlformats.org/drawingml/2006/main" prst="rect">
+            <a:avLst/>
+          </a:prstGeom>
+        </p:spPr>
+        <p:txBody>
+          <a:bodyPr xmlns:a="http://schemas.openxmlformats.org/drawingml/2006/main"/>
+          <a:lstStyle xmlns:a="http://schemas.openxmlformats.org/drawingml/2006/main"/>
+          <a:p xmlns:a="http://schemas.openxmlformats.org/drawingml/2006/main">
+            <a:r>
+              <a:rPr lang="en-US" sz="2800" b="1"/>
+              <a:t>name / zorder / autoFit / direction / font.cs</a:t>
+            </a:r>
+          </a:p>
+        </p:txBody>
+      </p:sp>
+      <p:sp>
+        <p:nvSpPr>
+          <p:cNvPr id="100023" name="intro-box"/>
+          <p:cNvSpPr txBox="1"/>
+          <p:nvPr/>
+        </p:nvSpPr>
+        <p:spPr>
+          <a:xfrm xmlns:a="http://schemas.openxmlformats.org/drawingml/2006/main">
+            <a:off x="457200" y="1097280"/>
+            <a:ext cx="4572000" cy="1371600"/>
+          </a:xfrm>
+          <a:prstGeom xmlns:a="http://schemas.openxmlformats.org/drawingml/2006/main" prst="rect">
+            <a:avLst/>
+          </a:prstGeom>
+          <a:solidFill xmlns:a="http://schemas.openxmlformats.org/drawingml/2006/main">
+            <a:srgbClr val="F1FAEE"/>
+          </a:solidFill>
+        </p:spPr>
+        <p:txBody>
+          <a:bodyPr xmlns:a="http://schemas.openxmlformats.org/drawingml/2006/main"/>
+          <a:lstStyle xmlns:a="http://schemas.openxmlformats.org/drawingml/2006/main"/>
+          <a:p xmlns:a="http://schemas.openxmlformats.org/drawingml/2006/main">
+            <a:r>
+              <a:rPr lang="en-US" sz="1600" b="1"/>
+              <a:t>This is intro-box.</a:t>
+            </a:r>
+          </a:p>
+        </p:txBody>
+      </p:sp>
+      <p:sp>
+        <p:nvSpPr>
+          <p:cNvPr id="100024" name="TextBox 3"/>
+          <p:cNvSpPr txBox="1"/>
+          <p:nvPr/>
+        </p:nvSpPr>
+        <p:spPr>
+          <a:xfrm xmlns:a="http://schemas.openxmlformats.org/drawingml/2006/main">
+            <a:off x="457200" y="2560320"/>
+            <a:ext cx="4572000" cy="457200"/>
+          </a:xfrm>
+          <a:prstGeom xmlns:a="http://schemas.openxmlformats.org/drawingml/2006/main" prst="rect">
+            <a:avLst/>
+          </a:prstGeom>
+        </p:spPr>
+        <p:txBody>
+          <a:bodyPr xmlns:a="http://schemas.openxmlformats.org/drawingml/2006/main"/>
+          <a:lstStyle xmlns:a="http://schemas.openxmlformats.org/drawingml/2006/main"/>
+          <a:p xmlns:a="http://schemas.openxmlformats.org/drawingml/2006/main">
+            <a:r>
+              <a:rPr lang="en-US" sz="1200" i="1">
+                <a:solidFill>
+                  <a:srgbClr val="666666"/>
+                </a:solidFill>
+              </a:rPr>
+              <a:t>name="intro-box"  → addressable as /slide[6]/shape[@name=intro-box]</a:t>
+            </a:r>
+          </a:p>
+        </p:txBody>
+      </p:sp>
+      <p:sp>
+        <p:nvSpPr>
+          <p:cNvPr id="100028" name="TextBox 7"/>
+          <p:cNvSpPr txBox="1"/>
+          <p:nvPr/>
+        </p:nvSpPr>
+        <p:spPr>
+          <a:xfrm xmlns:a="http://schemas.openxmlformats.org/drawingml/2006/main">
+            <a:off x="5486400" y="3840480"/>
+            <a:ext cx="4572000" cy="457200"/>
+          </a:xfrm>
+          <a:prstGeom xmlns:a="http://schemas.openxmlformats.org/drawingml/2006/main" prst="rect">
+            <a:avLst/>
+          </a:prstGeom>
+        </p:spPr>
+        <p:txBody>
+          <a:bodyPr xmlns:a="http://schemas.openxmlformats.org/drawingml/2006/main"/>
+          <a:lstStyle xmlns:a="http://schemas.openxmlformats.org/drawingml/2006/main"/>
+          <a:p xmlns:a="http://schemas.openxmlformats.org/drawingml/2006/main">
+            <a:r>
+              <a:rPr lang="en-US" sz="1200" i="1">
+                <a:solidFill>
+                  <a:srgbClr val="666666"/>
+                </a:solidFill>
+              </a:rPr>
+              <a:t>zorder=  controls stack depth; aliases: z-order, order.</a:t>
+            </a:r>
+          </a:p>
+        </p:txBody>
+      </p:sp>
+      <p:sp>
+        <p:nvSpPr>
+          <p:cNvPr id="100029" name="TextBox 8"/>
+          <p:cNvSpPr txBox="1"/>
+          <p:nvPr/>
+        </p:nvSpPr>
+        <p:spPr>
+          <a:xfrm xmlns:a="http://schemas.openxmlformats.org/drawingml/2006/main">
+            <a:off x="457200" y="3291840"/>
+            <a:ext cx="2743200" cy="1097280"/>
+          </a:xfrm>
+          <a:prstGeom xmlns:a="http://schemas.openxmlformats.org/drawingml/2006/main" prst="rect">
+            <a:avLst/>
+          </a:prstGeom>
+          <a:solidFill xmlns:a="http://schemas.openxmlformats.org/drawingml/2006/main">
+            <a:srgbClr val="FFE66D"/>
+          </a:solidFill>
+        </p:spPr>
+        <p:txBody>
+          <a:bodyPr xmlns:a="http://schemas.openxmlformats.org/drawingml/2006/main">
+            <a:normAutofit/>
+          </a:bodyPr>
+          <a:lstStyle xmlns:a="http://schemas.openxmlformats.org/drawingml/2006/main"/>
+          <a:p xmlns:a="http://schemas.openxmlformats.org/drawingml/2006/main">
+            <a:r>
+              <a:rPr lang="en-US" sz="1600"/>
+              <a:t>Vivamus lacinia odio vitae vestibulum vestibulum. Sed molestie augue sit amet leo consequat posuere.</a:t>
+            </a:r>
+          </a:p>
+        </p:txBody>
+      </p:sp>
+      <p:sp>
+        <p:nvSpPr>
+          <p:cNvPr id="100030" name="TextBox 9"/>
+          <p:cNvSpPr txBox="1"/>
+          <p:nvPr/>
+        </p:nvSpPr>
+        <p:spPr>
+          <a:xfrm xmlns:a="http://schemas.openxmlformats.org/drawingml/2006/main">
+            <a:off x="457200" y="4480560"/>
+            <a:ext cx="2743200" cy="457200"/>
+          </a:xfrm>
+          <a:prstGeom xmlns:a="http://schemas.openxmlformats.org/drawingml/2006/main" prst="rect">
+            <a:avLst/>
+          </a:prstGeom>
+        </p:spPr>
+        <p:txBody>
+          <a:bodyPr xmlns:a="http://schemas.openxmlformats.org/drawingml/2006/main"/>
+          <a:lstStyle xmlns:a="http://schemas.openxmlformats.org/drawingml/2006/main"/>
+          <a:p xmlns:a="http://schemas.openxmlformats.org/drawingml/2006/main">
+            <a:r>
+              <a:rPr lang="en-US" sz="1200" i="1">
+                <a:solidFill>
+                  <a:srgbClr val="666666"/>
+                </a:solidFill>
+              </a:rPr>
+              <a:t>autoFit=normal  (shrinks text to fit)</a:t>
+            </a:r>
+          </a:p>
+        </p:txBody>
+      </p:sp>
+      <p:sp>
+        <p:nvSpPr>
+          <p:cNvPr id="100031" name="TextBox 10"/>
+          <p:cNvSpPr txBox="1"/>
+          <p:nvPr/>
+        </p:nvSpPr>
+        <p:spPr>
+          <a:xfrm xmlns:a="http://schemas.openxmlformats.org/drawingml/2006/main">
+            <a:off x="457200" y="5120640"/>
+            <a:ext cx="4572000" cy="1097280"/>
+          </a:xfrm>
+          <a:prstGeom xmlns:a="http://schemas.openxmlformats.org/drawingml/2006/main" prst="rect">
+            <a:avLst/>
+          </a:prstGeom>
+          <a:solidFill xmlns:a="http://schemas.openxmlformats.org/drawingml/2006/main">
+            <a:srgbClr val="A8DADC"/>
+          </a:solidFill>
+        </p:spPr>
+        <p:txBody>
+          <a:bodyPr xmlns:a="http://schemas.openxmlformats.org/drawingml/2006/main" rtlCol="1"/>
+          <a:lstStyle xmlns:a="http://schemas.openxmlformats.org/drawingml/2006/main"/>
+          <a:p xmlns:a="http://schemas.openxmlformats.org/drawingml/2006/main">
+            <a:pPr algn="r" rtl="1"/>
+            <a:r>
+              <a:rPr lang="en-US" sz="2000" b="1">
+                <a:cs typeface="Arabic Typesetting"/>
+              </a:rPr>
+              <a:t>مرحبا بالعالم — 2026</a:t>
+            </a:r>
+          </a:p>
+        </p:txBody>
+      </p:sp>
+      <p:sp>
+        <p:nvSpPr>
+          <p:cNvPr id="100032" name="TextBox 11"/>
+          <p:cNvSpPr txBox="1"/>
+          <p:nvPr/>
+        </p:nvSpPr>
+        <p:spPr>
+          <a:xfrm xmlns:a="http://schemas.openxmlformats.org/drawingml/2006/main">
+            <a:off x="457200" y="6309360"/>
+            <a:ext cx="4572000" cy="457200"/>
+          </a:xfrm>
+          <a:prstGeom xmlns:a="http://schemas.openxmlformats.org/drawingml/2006/main" prst="rect">
+            <a:avLst/>
+          </a:prstGeom>
+        </p:spPr>
+        <p:txBody>
+          <a:bodyPr xmlns:a="http://schemas.openxmlformats.org/drawingml/2006/main"/>
+          <a:lstStyle xmlns:a="http://schemas.openxmlformats.org/drawingml/2006/main"/>
+          <a:p xmlns:a="http://schemas.openxmlformats.org/drawingml/2006/main">
+            <a:r>
+              <a:rPr lang="en-US" sz="1200" i="1">
+                <a:solidFill>
+                  <a:srgbClr val="666666"/>
+                </a:solidFill>
+              </a:rPr>
+              <a:t>direction=rtl + font.cs="Arabic Typesetting"  (complex-script slot)</a:t>
             </a:r>
           </a:p>
         </p:txBody>
